--- a/Examples/GroupDocs.Assembly.Examples.Java/Data/Output/Presentation Reports/PotToPptx.pptx
+++ b/Examples/GroupDocs.Assembly.Examples.Java/Data/Output/Presentation Reports/PotToPptx.pptx
@@ -567,7 +567,7 @@
           </a:lstStyle>
           <a:p>
             <a:pPr marL="0" lvl="0" indent="0" algn="r" eaLnBrk="1" hangingPunct="1"/>
-            <a:fld id="{54C1DCBD-AC3C-4150-A69E-55729E804043}" type="slidenum">
+            <a:fld id="{3E9095D3-1830-4092-AAEC-1A02EB73D0C8}" type="slidenum">
               <a:rPr lang="en-NZ" altLang="en-US" sz="1200">
                 <a:solidFill>
                   <a:srgbClr val="898989"/>
@@ -1011,7 +1011,7 @@
           </a:lstStyle>
           <a:p>
             <a:pPr marL="0" lvl="0" indent="0" algn="r" eaLnBrk="1" hangingPunct="1"/>
-            <a:fld id="{C85C2474-CE47-42F0-A122-308B6CC259BC}" type="slidenum">
+            <a:fld id="{ABB019A9-A4B3-4FD8-9E08-DC16EE034AF8}" type="slidenum">
               <a:rPr lang="en-NZ" altLang="en-US" sz="1200">
                 <a:solidFill>
                   <a:srgbClr val="898989"/>
@@ -1455,7 +1455,7 @@
           </a:lstStyle>
           <a:p>
             <a:pPr marL="0" lvl="0" indent="0" algn="r" eaLnBrk="1" hangingPunct="1"/>
-            <a:fld id="{8F7B11A1-7A6A-4CA6-A714-9FDA2EF59C39}" type="slidenum">
+            <a:fld id="{063BB80E-E011-44F2-948A-A64A990FB501}" type="slidenum">
               <a:rPr lang="en-NZ" altLang="en-US" sz="1200">
                 <a:solidFill>
                   <a:srgbClr val="898989"/>
@@ -1899,7 +1899,7 @@
           </a:lstStyle>
           <a:p>
             <a:pPr marL="0" lvl="0" indent="0" algn="r" eaLnBrk="1" hangingPunct="1"/>
-            <a:fld id="{38C5792F-518A-4CE1-A116-B6CE95FA4541}" type="slidenum">
+            <a:fld id="{23D9D64A-D8AF-4259-B1D1-B1C29E094218}" type="slidenum">
               <a:rPr lang="en-NZ" altLang="en-US" sz="1200">
                 <a:solidFill>
                   <a:srgbClr val="898989"/>
@@ -2409,7 +2409,7 @@
           </a:lstStyle>
           <a:p>
             <a:pPr marL="0" lvl="0" indent="0" algn="r" eaLnBrk="1" hangingPunct="1"/>
-            <a:fld id="{71DE93B8-29DF-4557-882B-490F1709CCE2}" type="slidenum">
+            <a:fld id="{51C8FB91-11F5-4D32-A88D-9ABFFEFA6B66}" type="slidenum">
               <a:rPr lang="en-NZ" altLang="en-US" sz="1200">
                 <a:solidFill>
                   <a:srgbClr val="898989"/>
@@ -2910,7 +2910,7 @@
           </a:lstStyle>
           <a:p>
             <a:pPr marL="0" lvl="0" indent="0" algn="r" eaLnBrk="1" hangingPunct="1"/>
-            <a:fld id="{5CB34E70-6BDF-4960-BC96-D7D4012AB2F7}" type="slidenum">
+            <a:fld id="{CD8A7470-7653-4536-A7B7-34D594812982}" type="slidenum">
               <a:rPr lang="en-NZ" altLang="en-US" sz="1200">
                 <a:solidFill>
                   <a:srgbClr val="898989"/>
@@ -3541,7 +3541,7 @@
           </a:lstStyle>
           <a:p>
             <a:pPr marL="0" lvl="0" indent="0" algn="r" eaLnBrk="1" hangingPunct="1"/>
-            <a:fld id="{9EC54412-B689-4E5B-8948-C7C5D2C4C9D5}" type="slidenum">
+            <a:fld id="{C0A98A21-641F-43D4-B759-F27D05B5B4FC}" type="slidenum">
               <a:rPr lang="en-NZ" altLang="en-US" sz="1200">
                 <a:solidFill>
                   <a:srgbClr val="898989"/>
@@ -3928,7 +3928,7 @@
           </a:lstStyle>
           <a:p>
             <a:pPr marL="0" lvl="0" indent="0" algn="r" eaLnBrk="1" hangingPunct="1"/>
-            <a:fld id="{9B3B4127-335B-4A95-9427-D4E131C9BC8D}" type="slidenum">
+            <a:fld id="{466C2B97-A620-4A72-999D-84429C023866}" type="slidenum">
               <a:rPr lang="en-NZ" altLang="en-US" sz="1200">
                 <a:solidFill>
                   <a:srgbClr val="898989"/>
@@ -4287,7 +4287,7 @@
           </a:lstStyle>
           <a:p>
             <a:pPr marL="0" lvl="0" indent="0" algn="r" eaLnBrk="1" hangingPunct="1"/>
-            <a:fld id="{07A36F53-BB00-41F2-9C30-A19EF08AD2A7}" type="slidenum">
+            <a:fld id="{1F4C417D-3957-4052-819C-931447717DAF}" type="slidenum">
               <a:rPr lang="en-NZ" altLang="en-US" sz="1200">
                 <a:solidFill>
                   <a:srgbClr val="898989"/>
@@ -4828,7 +4828,7 @@
           </a:lstStyle>
           <a:p>
             <a:pPr marL="0" lvl="0" indent="0" algn="r" eaLnBrk="1" hangingPunct="1"/>
-            <a:fld id="{FCA611A7-34D0-47A8-819A-4402051E494A}" type="slidenum">
+            <a:fld id="{6D33F594-8FBA-4F7A-AE34-8169BF9DD86E}" type="slidenum">
               <a:rPr lang="en-NZ" altLang="en-US" sz="1200">
                 <a:solidFill>
                   <a:srgbClr val="898989"/>
@@ -5395,7 +5395,7 @@
           </a:lstStyle>
           <a:p>
             <a:pPr marL="0" lvl="0" indent="0" algn="r" eaLnBrk="1" hangingPunct="1"/>
-            <a:fld id="{8D0066BF-C8E7-4253-A51A-E025ED79ECC0}" type="slidenum">
+            <a:fld id="{DBE1E53C-FB53-46C4-9DAB-F648DFA0E30E}" type="slidenum">
               <a:rPr lang="en-NZ" altLang="en-US" sz="1200">
                 <a:solidFill>
                   <a:srgbClr val="898989"/>
@@ -6098,7 +6098,7 @@
           </a:lstStyle>
           <a:p>
             <a:pPr marL="0" lvl="0" indent="0" algn="r" eaLnBrk="1" hangingPunct="1"/>
-            <a:fld id="{BB5271F3-A693-4BDD-A0EB-3E8A1B6D1A32}" type="slidenum">
+            <a:fld id="{F225E75C-B5E1-4F6F-BBE3-CC0B6488EAD6}" type="slidenum">
               <a:rPr lang="en-NZ" altLang="en-US" sz="1200">
                 <a:solidFill>
                   <a:srgbClr val="898989"/>

--- a/Examples/GroupDocs.Assembly.Examples.Java/Data/Output/Presentation Reports/PotToPptx.pptx
+++ b/Examples/GroupDocs.Assembly.Examples.Java/Data/Output/Presentation Reports/PotToPptx.pptx
@@ -567,7 +567,7 @@
           </a:lstStyle>
           <a:p>
             <a:pPr marL="0" lvl="0" indent="0" algn="r" eaLnBrk="1" hangingPunct="1"/>
-            <a:fld id="{3E9095D3-1830-4092-AAEC-1A02EB73D0C8}" type="slidenum">
+            <a:fld id="{B0B0712F-5603-4B56-9D3E-5449B73E7FD2}" type="slidenum">
               <a:rPr lang="en-NZ" altLang="en-US" sz="1200">
                 <a:solidFill>
                   <a:srgbClr val="898989"/>
@@ -1011,7 +1011,7 @@
           </a:lstStyle>
           <a:p>
             <a:pPr marL="0" lvl="0" indent="0" algn="r" eaLnBrk="1" hangingPunct="1"/>
-            <a:fld id="{ABB019A9-A4B3-4FD8-9E08-DC16EE034AF8}" type="slidenum">
+            <a:fld id="{C5F74DC0-5D7E-4391-B36A-2057F551B996}" type="slidenum">
               <a:rPr lang="en-NZ" altLang="en-US" sz="1200">
                 <a:solidFill>
                   <a:srgbClr val="898989"/>
@@ -1455,7 +1455,7 @@
           </a:lstStyle>
           <a:p>
             <a:pPr marL="0" lvl="0" indent="0" algn="r" eaLnBrk="1" hangingPunct="1"/>
-            <a:fld id="{063BB80E-E011-44F2-948A-A64A990FB501}" type="slidenum">
+            <a:fld id="{D75725B0-4151-4D1E-B84F-23A7E5FF9764}" type="slidenum">
               <a:rPr lang="en-NZ" altLang="en-US" sz="1200">
                 <a:solidFill>
                   <a:srgbClr val="898989"/>
@@ -1899,7 +1899,7 @@
           </a:lstStyle>
           <a:p>
             <a:pPr marL="0" lvl="0" indent="0" algn="r" eaLnBrk="1" hangingPunct="1"/>
-            <a:fld id="{23D9D64A-D8AF-4259-B1D1-B1C29E094218}" type="slidenum">
+            <a:fld id="{DFAF32D7-4387-4353-85E9-BED452E7E68F}" type="slidenum">
               <a:rPr lang="en-NZ" altLang="en-US" sz="1200">
                 <a:solidFill>
                   <a:srgbClr val="898989"/>
@@ -2409,7 +2409,7 @@
           </a:lstStyle>
           <a:p>
             <a:pPr marL="0" lvl="0" indent="0" algn="r" eaLnBrk="1" hangingPunct="1"/>
-            <a:fld id="{51C8FB91-11F5-4D32-A88D-9ABFFEFA6B66}" type="slidenum">
+            <a:fld id="{A85597A7-1A10-479B-9A4B-B5D712381F01}" type="slidenum">
               <a:rPr lang="en-NZ" altLang="en-US" sz="1200">
                 <a:solidFill>
                   <a:srgbClr val="898989"/>
@@ -2910,7 +2910,7 @@
           </a:lstStyle>
           <a:p>
             <a:pPr marL="0" lvl="0" indent="0" algn="r" eaLnBrk="1" hangingPunct="1"/>
-            <a:fld id="{CD8A7470-7653-4536-A7B7-34D594812982}" type="slidenum">
+            <a:fld id="{A16B7EDC-6A31-4834-898E-BAC326DDDD2E}" type="slidenum">
               <a:rPr lang="en-NZ" altLang="en-US" sz="1200">
                 <a:solidFill>
                   <a:srgbClr val="898989"/>
@@ -3541,7 +3541,7 @@
           </a:lstStyle>
           <a:p>
             <a:pPr marL="0" lvl="0" indent="0" algn="r" eaLnBrk="1" hangingPunct="1"/>
-            <a:fld id="{C0A98A21-641F-43D4-B759-F27D05B5B4FC}" type="slidenum">
+            <a:fld id="{46C8C1A7-E46E-49FC-80A4-DEFB44268968}" type="slidenum">
               <a:rPr lang="en-NZ" altLang="en-US" sz="1200">
                 <a:solidFill>
                   <a:srgbClr val="898989"/>
@@ -3928,7 +3928,7 @@
           </a:lstStyle>
           <a:p>
             <a:pPr marL="0" lvl="0" indent="0" algn="r" eaLnBrk="1" hangingPunct="1"/>
-            <a:fld id="{466C2B97-A620-4A72-999D-84429C023866}" type="slidenum">
+            <a:fld id="{6EF784D1-675D-443D-945D-13EFE968B0C6}" type="slidenum">
               <a:rPr lang="en-NZ" altLang="en-US" sz="1200">
                 <a:solidFill>
                   <a:srgbClr val="898989"/>
@@ -4287,7 +4287,7 @@
           </a:lstStyle>
           <a:p>
             <a:pPr marL="0" lvl="0" indent="0" algn="r" eaLnBrk="1" hangingPunct="1"/>
-            <a:fld id="{1F4C417D-3957-4052-819C-931447717DAF}" type="slidenum">
+            <a:fld id="{42503ED6-0B15-4951-8630-A9367A1C0225}" type="slidenum">
               <a:rPr lang="en-NZ" altLang="en-US" sz="1200">
                 <a:solidFill>
                   <a:srgbClr val="898989"/>
@@ -4828,7 +4828,7 @@
           </a:lstStyle>
           <a:p>
             <a:pPr marL="0" lvl="0" indent="0" algn="r" eaLnBrk="1" hangingPunct="1"/>
-            <a:fld id="{6D33F594-8FBA-4F7A-AE34-8169BF9DD86E}" type="slidenum">
+            <a:fld id="{545D8A11-449D-4F85-AF89-FF5981E6F448}" type="slidenum">
               <a:rPr lang="en-NZ" altLang="en-US" sz="1200">
                 <a:solidFill>
                   <a:srgbClr val="898989"/>
@@ -5395,7 +5395,7 @@
           </a:lstStyle>
           <a:p>
             <a:pPr marL="0" lvl="0" indent="0" algn="r" eaLnBrk="1" hangingPunct="1"/>
-            <a:fld id="{DBE1E53C-FB53-46C4-9DAB-F648DFA0E30E}" type="slidenum">
+            <a:fld id="{AC81E543-BA81-4057-BA2A-CFA48CF95A7D}" type="slidenum">
               <a:rPr lang="en-NZ" altLang="en-US" sz="1200">
                 <a:solidFill>
                   <a:srgbClr val="898989"/>
@@ -6098,7 +6098,7 @@
           </a:lstStyle>
           <a:p>
             <a:pPr marL="0" lvl="0" indent="0" algn="r" eaLnBrk="1" hangingPunct="1"/>
-            <a:fld id="{F225E75C-B5E1-4F6F-BBE3-CC0B6488EAD6}" type="slidenum">
+            <a:fld id="{9FD33FD3-B797-4BCA-B7DC-08606ACFDAEF}" type="slidenum">
               <a:rPr lang="en-NZ" altLang="en-US" sz="1200">
                 <a:solidFill>
                   <a:srgbClr val="898989"/>

--- a/Examples/GroupDocs.Assembly.Examples.Java/Data/Output/Presentation Reports/PotToPptx.pptx
+++ b/Examples/GroupDocs.Assembly.Examples.Java/Data/Output/Presentation Reports/PotToPptx.pptx
@@ -567,7 +567,7 @@
           </a:lstStyle>
           <a:p>
             <a:pPr marL="0" lvl="0" indent="0" algn="r" eaLnBrk="1" hangingPunct="1"/>
-            <a:fld id="{B0B0712F-5603-4B56-9D3E-5449B73E7FD2}" type="slidenum">
+            <a:fld id="{B5F8E272-9B37-4534-9FF0-A4B4213370D3}" type="slidenum">
               <a:rPr lang="en-NZ" altLang="en-US" sz="1200">
                 <a:solidFill>
                   <a:srgbClr val="898989"/>
@@ -1011,7 +1011,7 @@
           </a:lstStyle>
           <a:p>
             <a:pPr marL="0" lvl="0" indent="0" algn="r" eaLnBrk="1" hangingPunct="1"/>
-            <a:fld id="{C5F74DC0-5D7E-4391-B36A-2057F551B996}" type="slidenum">
+            <a:fld id="{696CA80F-3B85-4677-BBB2-30B5B7987C6B}" type="slidenum">
               <a:rPr lang="en-NZ" altLang="en-US" sz="1200">
                 <a:solidFill>
                   <a:srgbClr val="898989"/>
@@ -1455,7 +1455,7 @@
           </a:lstStyle>
           <a:p>
             <a:pPr marL="0" lvl="0" indent="0" algn="r" eaLnBrk="1" hangingPunct="1"/>
-            <a:fld id="{D75725B0-4151-4D1E-B84F-23A7E5FF9764}" type="slidenum">
+            <a:fld id="{48ADFEB6-24D0-4ABB-98F4-A8B0B5BD469A}" type="slidenum">
               <a:rPr lang="en-NZ" altLang="en-US" sz="1200">
                 <a:solidFill>
                   <a:srgbClr val="898989"/>
@@ -1899,7 +1899,7 @@
           </a:lstStyle>
           <a:p>
             <a:pPr marL="0" lvl="0" indent="0" algn="r" eaLnBrk="1" hangingPunct="1"/>
-            <a:fld id="{DFAF32D7-4387-4353-85E9-BED452E7E68F}" type="slidenum">
+            <a:fld id="{26C66AEC-6205-4FE3-8098-78761590A0FE}" type="slidenum">
               <a:rPr lang="en-NZ" altLang="en-US" sz="1200">
                 <a:solidFill>
                   <a:srgbClr val="898989"/>
@@ -2409,7 +2409,7 @@
           </a:lstStyle>
           <a:p>
             <a:pPr marL="0" lvl="0" indent="0" algn="r" eaLnBrk="1" hangingPunct="1"/>
-            <a:fld id="{A85597A7-1A10-479B-9A4B-B5D712381F01}" type="slidenum">
+            <a:fld id="{0B264ABD-744D-4FFB-8912-CB2D994109D1}" type="slidenum">
               <a:rPr lang="en-NZ" altLang="en-US" sz="1200">
                 <a:solidFill>
                   <a:srgbClr val="898989"/>
@@ -2910,7 +2910,7 @@
           </a:lstStyle>
           <a:p>
             <a:pPr marL="0" lvl="0" indent="0" algn="r" eaLnBrk="1" hangingPunct="1"/>
-            <a:fld id="{A16B7EDC-6A31-4834-898E-BAC326DDDD2E}" type="slidenum">
+            <a:fld id="{85E7FDE0-CA1F-4416-824C-E2AE135D4EE1}" type="slidenum">
               <a:rPr lang="en-NZ" altLang="en-US" sz="1200">
                 <a:solidFill>
                   <a:srgbClr val="898989"/>
@@ -3541,7 +3541,7 @@
           </a:lstStyle>
           <a:p>
             <a:pPr marL="0" lvl="0" indent="0" algn="r" eaLnBrk="1" hangingPunct="1"/>
-            <a:fld id="{46C8C1A7-E46E-49FC-80A4-DEFB44268968}" type="slidenum">
+            <a:fld id="{03424557-D110-4619-8334-CAD82620B094}" type="slidenum">
               <a:rPr lang="en-NZ" altLang="en-US" sz="1200">
                 <a:solidFill>
                   <a:srgbClr val="898989"/>
@@ -3928,7 +3928,7 @@
           </a:lstStyle>
           <a:p>
             <a:pPr marL="0" lvl="0" indent="0" algn="r" eaLnBrk="1" hangingPunct="1"/>
-            <a:fld id="{6EF784D1-675D-443D-945D-13EFE968B0C6}" type="slidenum">
+            <a:fld id="{602EF21A-6751-4E9E-A59A-3ADEDFFBB36F}" type="slidenum">
               <a:rPr lang="en-NZ" altLang="en-US" sz="1200">
                 <a:solidFill>
                   <a:srgbClr val="898989"/>
@@ -4287,7 +4287,7 @@
           </a:lstStyle>
           <a:p>
             <a:pPr marL="0" lvl="0" indent="0" algn="r" eaLnBrk="1" hangingPunct="1"/>
-            <a:fld id="{42503ED6-0B15-4951-8630-A9367A1C0225}" type="slidenum">
+            <a:fld id="{4E9E5E22-ED63-4548-8DAF-437F8263F10C}" type="slidenum">
               <a:rPr lang="en-NZ" altLang="en-US" sz="1200">
                 <a:solidFill>
                   <a:srgbClr val="898989"/>
@@ -4828,7 +4828,7 @@
           </a:lstStyle>
           <a:p>
             <a:pPr marL="0" lvl="0" indent="0" algn="r" eaLnBrk="1" hangingPunct="1"/>
-            <a:fld id="{545D8A11-449D-4F85-AF89-FF5981E6F448}" type="slidenum">
+            <a:fld id="{652D2BC2-8D2E-4572-9E32-71115AD94F67}" type="slidenum">
               <a:rPr lang="en-NZ" altLang="en-US" sz="1200">
                 <a:solidFill>
                   <a:srgbClr val="898989"/>
@@ -5395,7 +5395,7 @@
           </a:lstStyle>
           <a:p>
             <a:pPr marL="0" lvl="0" indent="0" algn="r" eaLnBrk="1" hangingPunct="1"/>
-            <a:fld id="{AC81E543-BA81-4057-BA2A-CFA48CF95A7D}" type="slidenum">
+            <a:fld id="{943D1451-6D1B-4125-B118-CE6802FD2D51}" type="slidenum">
               <a:rPr lang="en-NZ" altLang="en-US" sz="1200">
                 <a:solidFill>
                   <a:srgbClr val="898989"/>
@@ -6098,7 +6098,7 @@
           </a:lstStyle>
           <a:p>
             <a:pPr marL="0" lvl="0" indent="0" algn="r" eaLnBrk="1" hangingPunct="1"/>
-            <a:fld id="{9FD33FD3-B797-4BCA-B7DC-08606ACFDAEF}" type="slidenum">
+            <a:fld id="{AF60DA59-9147-4203-B6BA-D29375041683}" type="slidenum">
               <a:rPr lang="en-NZ" altLang="en-US" sz="1200">
                 <a:solidFill>
                   <a:srgbClr val="898989"/>
